--- a/dist/초1/도덕·윤리/자신과타인/초1_도덕·윤리_자신과타인_01_나는소중해요_학생용.pptx
+++ b/dist/초1/도덕·윤리/자신과타인/초1_도덕·윤리_자신과타인_01_나는소중해요_학생용.pptx
@@ -119,13 +119,13 @@
   <p:extLst>
     <p:ext uri="{521415D9-36F7-43E2-AB2F-B90AF26B5E84}">
       <p14:sectionLst xmlns:p14="http://schemas.microsoft.com/office/powerpoint/2010/main">
-        <p14:section name="도입" id="{e60b9381-4d72-35ca-753e-09520e8c8d97}">
+        <p14:section name="도입" id="{7cfa81e0-4fd4-5883-1f58-9fc4fd16081d}">
           <p14:sldIdLst>
             <p14:sldId id="256"/>
             <p14:sldId id="257"/>
           </p14:sldIdLst>
         </p14:section>
-        <p14:section name="개념" id="{ebf48355-e420-2cf7-4a20-0752ef70d5e7}">
+        <p14:section name="개념" id="{a0ff4690-8a2f-df13-6aac-52b8b518c1b4}">
           <p14:sldIdLst>
             <p14:sldId id="258"/>
             <p14:sldId id="259"/>
@@ -133,25 +133,25 @@
             <p14:sldId id="261"/>
           </p14:sldIdLst>
         </p14:section>
-        <p14:section name="연습" id="{b226f131-30a7-e29d-f2e2-91a6cdb26dd4}">
+        <p14:section name="연습" id="{551cf96b-a22b-5610-2730-c062430fc0d0}">
           <p14:sldIdLst>
             <p14:sldId id="262"/>
             <p14:sldId id="263"/>
             <p14:sldId id="264"/>
           </p14:sldIdLst>
         </p14:section>
-        <p14:section name="확인" id="{03037a3e-cf49-051e-2314-915bb8108b7a}">
+        <p14:section name="확인" id="{056cfa98-d9d7-a970-2910-f7071aab0752}">
           <p14:sldIdLst>
             <p14:sldId id="265"/>
             <p14:sldId id="266"/>
           </p14:sldIdLst>
         </p14:section>
-        <p14:section name="정리" id="{423b3781-e00b-a877-69c0-6c1f4cb1c72c}">
+        <p14:section name="정리" id="{533a3682-78b7-b8e2-98fd-459486e4a397}">
           <p14:sldIdLst>
             <p14:sldId id="267"/>
           </p14:sldIdLst>
         </p14:section>
-        <p14:section name="보충" id="{10fb3644-895f-e0f6-0ffb-844f338dd843}">
+        <p14:section name="보충" id="{4a465781-5cf1-7749-5a49-5a18db02000b}">
           <p14:sldIdLst>
             <p14:sldId id="268"/>
           </p14:sldIdLst>
